--- a/builder/assets/reference-pages/dumbbell-gap.pptx
+++ b/builder/assets/reference-pages/dumbbell-gap.pptx
@@ -1097,7 +1097,7 @@
                   <a:srgbClr val="15375F"/>
                 </a:solidFill>
               </a:rPr>
-              <a:t>十项指标中三项差距达 16 个百分点以上，且均为客户敏感指标</a:t>
+              <a:t>Three of the ten indicators have a gap of 16 percentage points or above, and they are all customer-sensitive indicators.</a:t>
             </a:r>
           </a:p>
         </p:txBody>
@@ -1182,7 +1182,7 @@
                   <a:srgbClr val="15375F"/>
                 </a:solidFill>
               </a:rPr>
-              <a:t>差距｜改善难度</a:t>
+              <a:t>gap｜Improve difficulty</a:t>
             </a:r>
           </a:p>
         </p:txBody>
@@ -1263,7 +1263,7 @@
                   <a:srgbClr val="172033"/>
                 </a:solidFill>
               </a:rPr>
-              <a:t>效率类｜招聘周期 (↓)</a:t>
+              <a:t>Efficiency｜recruitment cycle (↓)</a:t>
             </a:r>
           </a:p>
           <a:p xmlns:a="http://schemas.openxmlformats.org/drawingml/2006/main">
@@ -1280,7 +1280,7 @@
                   <a:srgbClr val="172033"/>
                 </a:solidFill>
               </a:rPr>
-              <a:t>根因：审批链过长</a:t>
+              <a:t>Root cause: The approval chain is too long</a:t>
             </a:r>
           </a:p>
         </p:txBody>
@@ -1545,7 +1545,7 @@
                   <a:srgbClr val="E8872D"/>
                 </a:solidFill>
               </a:rPr>
-              <a:t>17｜改善难度 ★★☆</a:t>
+              <a:t>17｜Improve difficulty ★★☆</a:t>
             </a:r>
           </a:p>
         </p:txBody>
@@ -1626,7 +1626,7 @@
                   <a:srgbClr val="172033"/>
                 </a:solidFill>
               </a:rPr>
-              <a:t>质量类｜关键岗位到岗率</a:t>
+              <a:t>Quality category｜Arrival rate of key positions</a:t>
             </a:r>
           </a:p>
           <a:p xmlns:a="http://schemas.openxmlformats.org/drawingml/2006/main">
@@ -1643,7 +1643,7 @@
                   <a:srgbClr val="172033"/>
                 </a:solidFill>
               </a:rPr>
-              <a:t>根因：人才池不足</a:t>
+              <a:t>Root cause: Insufficient talent pool</a:t>
             </a:r>
           </a:p>
         </p:txBody>
@@ -1908,7 +1908,7 @@
                   <a:srgbClr val="E8872D"/>
                 </a:solidFill>
               </a:rPr>
-              <a:t>17｜改善难度 ★★★</a:t>
+              <a:t>17｜Improve difficulty ★★★</a:t>
             </a:r>
           </a:p>
         </p:txBody>
@@ -1989,7 +1989,7 @@
                   <a:srgbClr val="172033"/>
                 </a:solidFill>
               </a:rPr>
-              <a:t>体验类｜员工净推荐值</a:t>
+              <a:t>Experience category｜Employee Net Promoter Score</a:t>
             </a:r>
           </a:p>
           <a:p xmlns:a="http://schemas.openxmlformats.org/drawingml/2006/main">
@@ -2006,7 +2006,7 @@
                   <a:srgbClr val="172033"/>
                 </a:solidFill>
               </a:rPr>
-              <a:t>根因：反馈闭环慢</a:t>
+              <a:t>Root cause: slow feedback loop</a:t>
             </a:r>
           </a:p>
         </p:txBody>
@@ -2271,7 +2271,7 @@
                   <a:srgbClr val="E8872D"/>
                 </a:solidFill>
               </a:rPr>
-              <a:t>16｜改善难度 ★★☆</a:t>
+              <a:t>16｜Improve difficulty ★★☆</a:t>
             </a:r>
           </a:p>
         </p:txBody>
@@ -2321,7 +2321,7 @@
                   <a:srgbClr val="172033"/>
                 </a:solidFill>
               </a:rPr>
-              <a:t>效率类｜服务响应率</a:t>
+              <a:t>Efficiency｜service response rate</a:t>
             </a:r>
           </a:p>
         </p:txBody>
@@ -2586,7 +2586,7 @@
                   <a:srgbClr val="697386"/>
                 </a:solidFill>
               </a:rPr>
-              <a:t>14｜改善难度 ★☆☆</a:t>
+              <a:t>14｜Improve difficulty ★☆☆</a:t>
             </a:r>
           </a:p>
         </p:txBody>
@@ -2636,7 +2636,7 @@
                   <a:srgbClr val="172033"/>
                 </a:solidFill>
               </a:rPr>
-              <a:t>质量类｜绩优人才留存</a:t>
+              <a:t>Quality category｜Retaining high-quality talents</a:t>
             </a:r>
           </a:p>
         </p:txBody>
@@ -2901,7 +2901,7 @@
                   <a:srgbClr val="697386"/>
                 </a:solidFill>
               </a:rPr>
-              <a:t>13｜改善难度 ★★★</a:t>
+              <a:t>13｜Improve difficulty ★★★</a:t>
             </a:r>
           </a:p>
         </p:txBody>
@@ -2951,7 +2951,7 @@
                   <a:srgbClr val="172033"/>
                 </a:solidFill>
               </a:rPr>
-              <a:t>体验类｜经理满意度</a:t>
+              <a:t>Experience category｜manager satisfaction</a:t>
             </a:r>
           </a:p>
         </p:txBody>
@@ -3216,7 +3216,7 @@
                   <a:srgbClr val="697386"/>
                 </a:solidFill>
               </a:rPr>
-              <a:t>12｜改善难度 ★★☆</a:t>
+              <a:t>12｜Improve difficulty ★★☆</a:t>
             </a:r>
           </a:p>
         </p:txBody>
@@ -3266,7 +3266,7 @@
                   <a:srgbClr val="172033"/>
                 </a:solidFill>
               </a:rPr>
-              <a:t>效率类｜自动化覆盖率</a:t>
+              <a:t>Efficiency｜Automation coverage</a:t>
             </a:r>
           </a:p>
         </p:txBody>
@@ -3531,7 +3531,7 @@
                   <a:srgbClr val="697386"/>
                 </a:solidFill>
               </a:rPr>
-              <a:t>11｜改善难度 ★★☆</a:t>
+              <a:t>11｜Improve difficulty ★★☆</a:t>
             </a:r>
           </a:p>
         </p:txBody>
@@ -3581,7 +3581,7 @@
                   <a:srgbClr val="172033"/>
                 </a:solidFill>
               </a:rPr>
-              <a:t>质量类｜数据准确率</a:t>
+              <a:t>Quality category｜Data accuracy</a:t>
             </a:r>
           </a:p>
         </p:txBody>
@@ -3846,7 +3846,7 @@
                   <a:srgbClr val="697386"/>
                 </a:solidFill>
               </a:rPr>
-              <a:t>9｜改善难度 ★☆☆</a:t>
+              <a:t>9｜Improve difficulty ★☆☆</a:t>
             </a:r>
           </a:p>
         </p:txBody>
@@ -3896,7 +3896,7 @@
                   <a:srgbClr val="172033"/>
                 </a:solidFill>
               </a:rPr>
-              <a:t>体验类｜培训完成率</a:t>
+              <a:t>Experience category｜training completion rate</a:t>
             </a:r>
           </a:p>
         </p:txBody>
@@ -4161,7 +4161,7 @@
                   <a:srgbClr val="697386"/>
                 </a:solidFill>
               </a:rPr>
-              <a:t>8｜改善难度 ★☆☆</a:t>
+              <a:t>8｜Improve difficulty ★☆☆</a:t>
             </a:r>
           </a:p>
         </p:txBody>
@@ -4211,7 +4211,7 @@
                   <a:srgbClr val="172033"/>
                 </a:solidFill>
               </a:rPr>
-              <a:t>效率类｜预算偏差 (↓)</a:t>
+              <a:t>Efficiency｜Budget deviation (↓)</a:t>
             </a:r>
           </a:p>
         </p:txBody>
@@ -4476,14 +4476,14 @@
                   <a:srgbClr val="697386"/>
                 </a:solidFill>
               </a:rPr>
-              <a:t>5｜改善难度 ★★☆</a:t>
-            </a:r>
-          </a:p>
-        </p:txBody>
-      </p:sp>
-      <p:sp>
-        <p:nvSpPr>
-          <p:cNvPr id="77" name="关键洞察-rail">
+              <a:t>5｜Improve difficulty ★★☆</a:t>
+            </a:r>
+          </a:p>
+        </p:txBody>
+      </p:sp>
+      <p:sp>
+        <p:nvSpPr>
+          <p:cNvPr id="77" name="key insights-rail">
             <a:extLst xmlns:a="http://schemas.openxmlformats.org/drawingml/2006/main">
               <a:ext uri="{FF2B5EF4-FFF2-40B4-BE49-F238E27FC236}">
                 <a16:creationId xmlns:a16="http://schemas.microsoft.com/office/drawing/2014/main" id="{D066BDD6-4616-42A3-9F21-D613FDD61DCE}"/>
@@ -4518,7 +4518,7 @@
       </p:sp>
       <p:sp>
         <p:nvSpPr>
-          <p:cNvPr id="78" name="关键洞察-title">
+          <p:cNvPr id="78" name="key insights-title">
             <a:extLst xmlns:a="http://schemas.openxmlformats.org/drawingml/2006/main">
               <a:ext uri="{FF2B5EF4-FFF2-40B4-BE49-F238E27FC236}">
                 <a16:creationId xmlns:a16="http://schemas.microsoft.com/office/drawing/2014/main" id="{1A889AA4-096B-4F92-912C-F50132656E47}"/>
@@ -4561,14 +4561,14 @@
                   <a:srgbClr val="15375F"/>
                 </a:solidFill>
               </a:rPr>
-              <a:t>关键洞察</a:t>
-            </a:r>
-          </a:p>
-        </p:txBody>
-      </p:sp>
-      <p:sp>
-        <p:nvSpPr>
-          <p:cNvPr id="79" name="关键洞察-item-1">
+              <a:t>key insights</a:t>
+            </a:r>
+          </a:p>
+        </p:txBody>
+      </p:sp>
+      <p:sp>
+        <p:nvSpPr>
+          <p:cNvPr id="79" name="key insights-item-1">
             <a:extLst xmlns:a="http://schemas.openxmlformats.org/drawingml/2006/main">
               <a:ext uri="{FF2B5EF4-FFF2-40B4-BE49-F238E27FC236}">
                 <a16:creationId xmlns:a16="http://schemas.microsoft.com/office/drawing/2014/main" id="{359223D2-A086-40F4-847F-A499F2FC9CED}"/>
@@ -4617,14 +4617,14 @@
                   <a:srgbClr val="172033"/>
                 </a:solidFill>
               </a:rPr>
-              <a:t>招聘周期差距最大</a:t>
-            </a:r>
-          </a:p>
-        </p:txBody>
-      </p:sp>
-      <p:sp>
-        <p:nvSpPr>
-          <p:cNvPr id="80" name="关键洞察-item-2">
+              <a:t>The biggest difference in recruitment cycle</a:t>
+            </a:r>
+          </a:p>
+        </p:txBody>
+      </p:sp>
+      <p:sp>
+        <p:nvSpPr>
+          <p:cNvPr id="80" name="key insights-item-2">
             <a:extLst xmlns:a="http://schemas.openxmlformats.org/drawingml/2006/main">
               <a:ext uri="{FF2B5EF4-FFF2-40B4-BE49-F238E27FC236}">
                 <a16:creationId xmlns:a16="http://schemas.microsoft.com/office/drawing/2014/main" id="{A5EA4778-A590-41BE-9E83-E6FBE73AFBA4}"/>
@@ -4673,14 +4673,14 @@
                   <a:srgbClr val="172033"/>
                 </a:solidFill>
               </a:rPr>
-              <a:t>前三项均直接影响客户体验</a:t>
-            </a:r>
-          </a:p>
-        </p:txBody>
-      </p:sp>
-      <p:sp>
-        <p:nvSpPr>
-          <p:cNvPr id="81" name="关键洞察-item-3">
+              <a:t>The first three items all directly affect customer experience</a:t>
+            </a:r>
+          </a:p>
+        </p:txBody>
+      </p:sp>
+      <p:sp>
+        <p:nvSpPr>
+          <p:cNvPr id="81" name="key insights-item-3">
             <a:extLst xmlns:a="http://schemas.openxmlformats.org/drawingml/2006/main">
               <a:ext uri="{FF2B5EF4-FFF2-40B4-BE49-F238E27FC236}">
                 <a16:creationId xmlns:a16="http://schemas.microsoft.com/office/drawing/2014/main" id="{B3451B44-7E57-44AF-80B5-BC30B583B337}"/>
@@ -4729,7 +4729,7 @@
                   <a:srgbClr val="172033"/>
                 </a:solidFill>
               </a:rPr>
-              <a:t>补齐前三项可显著提升整体指数</a:t>
+              <a:t>Completing the first three items can significantly improve the overall index</a:t>
             </a:r>
           </a:p>
         </p:txBody>
@@ -4785,7 +4785,7 @@
                   <a:srgbClr val="15375F"/>
                 </a:solidFill>
               </a:rPr>
-              <a:t>若补齐前三项，整体指数可从 68 提升至 82</a:t>
+              <a:t>If the first three items are completed, the overall index can be calculated from 68 promoted to 82</a:t>
             </a:r>
           </a:p>
         </p:txBody>
